--- a/curso_es/pptx/S69.pptx
+++ b/curso_es/pptx/S69.pptx
@@ -5322,7 +5322,7 @@
                 </a:solidFill>
                 <a:latin typeface="Nunito Sans"/>
               </a:rPr>
-              <a:t>Maialen tiene 15 bolsas de tela con dibujos de hojas: se las regalan en cada tienda. Las usa una vez y las guarda. «Soy muy ecológica», dice. (Ejemplo inventado.)</a:t>
+              <a:t>Una chica tiene 15 bolsas de tela con dibujos de hojas: se las regalan en cada tienda. Las usa una vez y las guarda. «Soy muy ecológica», dice. (Ejemplo inventado.)</a:t>
             </a:r>
           </a:p>
         </p:txBody>
